--- a/design_considerations/SPARC-design.pptx
+++ b/design_considerations/SPARC-design.pptx
@@ -127,12 +127,41 @@
 </p:presentation>
 </file>
 
-<file path=ppt/revisionInfo.xml><?xml version="1.0" encoding="utf-8"?>
-<p1510:revInfo xmlns:a="http://schemas.openxmlformats.org/drawingml/2006/main" xmlns:r="http://schemas.openxmlformats.org/officeDocument/2006/relationships" xmlns:p1510="http://schemas.microsoft.com/office/powerpoint/2015/10/main">
-  <p1510:revLst>
-    <p1510:client id="{BA0EA008-82DD-4DE9-8E33-4EFB8D869763}" v="66" dt="2024-06-17T18:43:59.851"/>
-  </p1510:revLst>
-</p1510:revInfo>
+<file path=ppt/changesInfos/changesInfo1.xml><?xml version="1.0" encoding="utf-8"?>
+<pc:chgInfo xmlns:a="http://schemas.openxmlformats.org/drawingml/2006/main" xmlns:r="http://schemas.openxmlformats.org/officeDocument/2006/relationships" xmlns:ac="http://schemas.microsoft.com/office/drawing/2013/main/command" xmlns:pc="http://schemas.microsoft.com/office/powerpoint/2013/main/command">
+  <pc:docChgLst>
+    <pc:chgData name="Cebastione Bailey" userId="34105aa9bb97034c" providerId="LiveId" clId="{BE9028CD-E18D-49CA-8390-4E45E622F8AA}"/>
+    <pc:docChg chg="undo custSel modSld">
+      <pc:chgData name="Cebastione Bailey" userId="34105aa9bb97034c" providerId="LiveId" clId="{BE9028CD-E18D-49CA-8390-4E45E622F8AA}" dt="2026-10-02T16:02:55.933" v="3" actId="1076"/>
+      <pc:docMkLst>
+        <pc:docMk/>
+      </pc:docMkLst>
+      <pc:sldChg chg="modSp mod">
+        <pc:chgData name="Cebastione Bailey" userId="34105aa9bb97034c" providerId="LiveId" clId="{BE9028CD-E18D-49CA-8390-4E45E622F8AA}" dt="2026-10-02T16:02:55.933" v="3" actId="1076"/>
+        <pc:sldMkLst>
+          <pc:docMk/>
+          <pc:sldMk cId="1833896177" sldId="263"/>
+        </pc:sldMkLst>
+        <pc:spChg chg="mod">
+          <ac:chgData name="Cebastione Bailey" userId="34105aa9bb97034c" providerId="LiveId" clId="{BE9028CD-E18D-49CA-8390-4E45E622F8AA}" dt="2026-10-02T16:02:55.933" v="3" actId="1076"/>
+          <ac:spMkLst>
+            <pc:docMk/>
+            <pc:sldMk cId="1833896177" sldId="263"/>
+            <ac:spMk id="2" creationId="{69A2DBD1-2600-A0FB-CBCB-24EA083BF47F}"/>
+          </ac:spMkLst>
+        </pc:spChg>
+        <pc:spChg chg="mod">
+          <ac:chgData name="Cebastione Bailey" userId="34105aa9bb97034c" providerId="LiveId" clId="{BE9028CD-E18D-49CA-8390-4E45E622F8AA}" dt="2026-10-02T16:02:46.842" v="1" actId="1076"/>
+          <ac:spMkLst>
+            <pc:docMk/>
+            <pc:sldMk cId="1833896177" sldId="263"/>
+            <ac:spMk id="4" creationId="{84241C1F-C118-A756-7BF2-ADD93416DBB8}"/>
+          </ac:spMkLst>
+        </pc:spChg>
+      </pc:sldChg>
+    </pc:docChg>
+  </pc:docChgLst>
+</pc:chgInfo>
 </file>
 
 <file path=ppt/handoutMasters/handoutMaster1.xml><?xml version="1.0" encoding="utf-8"?>
@@ -229,7 +258,7 @@
           <a:p>
             <a:fld id="{7D038C9C-4B69-864E-9EEE-DFA43CC144D2}" type="datetimeFigureOut">
               <a:rPr lang="en-US" smtClean="0"/>
-              <a:t>3/13/2025</a:t>
+              <a:t>10/2/2026</a:t>
             </a:fld>
             <a:endParaRPr lang="en-US"/>
           </a:p>
@@ -406,7 +435,7 @@
           <a:p>
             <a:fld id="{41D9A61E-B1D6-C34D-A321-B3E90F6DE630}" type="datetimeFigureOut">
               <a:rPr lang="en-US" smtClean="0"/>
-              <a:t>3/13/2025</a:t>
+              <a:t>10/2/2026</a:t>
             </a:fld>
             <a:endParaRPr lang="en-US"/>
           </a:p>
@@ -3516,22 +3545,19 @@
             <p:ph type="title"/>
           </p:nvPr>
         </p:nvSpPr>
-        <p:spPr/>
+        <p:spPr>
+          <a:xfrm>
+            <a:off x="838200" y="193517"/>
+            <a:ext cx="10515600" cy="1325563"/>
+          </a:xfrm>
+        </p:spPr>
         <p:txBody>
           <a:bodyPr/>
           <a:lstStyle/>
           <a:p>
             <a:r>
               <a:rPr lang="en-US" dirty="0"/>
-              <a:t>What Will the </a:t>
-            </a:r>
-            <a:r>
-              <a:rPr lang="en-US"/>
-              <a:t>Battery Module </a:t>
-            </a:r>
-            <a:r>
-              <a:rPr lang="en-US" dirty="0"/>
-              <a:t>look like?</a:t>
+              <a:t>What Will the Battery Module look like?</a:t>
             </a:r>
           </a:p>
         </p:txBody>
@@ -3552,7 +3578,12 @@
             <p:ph type="sldNum" sz="quarter" idx="12"/>
           </p:nvPr>
         </p:nvSpPr>
-        <p:spPr/>
+        <p:spPr>
+          <a:xfrm>
+            <a:off x="274383" y="6119651"/>
+            <a:ext cx="2635332" cy="365125"/>
+          </a:xfrm>
+        </p:spPr>
         <p:txBody>
           <a:bodyPr/>
           <a:lstStyle/>
